--- a/Doc/KIS-Projekt-Praesentation.pptx
+++ b/Doc/KIS-Projekt-Praesentation.pptx
@@ -1686,7 +1686,7 @@
           <a:p>
             <a:fld id="{5BCAD085-E8A6-8845-BD4E-CB4CCA059FC4}" type="datetimeFigureOut">
               <a:rPr lang="en-US" smtClean="0"/>
-              <a:t>6/18/2026</a:t>
+              <a:t>6/20/2026</a:t>
             </a:fld>
             <a:endParaRPr lang="en-US"/>
           </a:p>
@@ -1728,7 +1728,7 @@
           <a:p>
             <a:fld id="{C1FF6DA9-008F-8B48-92A6-B652298478BF}" type="slidenum">
               <a:rPr lang="en-US" smtClean="0"/>
-              <a:t>‹#›</a:t>
+              <a:t>‹Nr.›</a:t>
             </a:fld>
             <a:endParaRPr lang="en-US"/>
           </a:p>
@@ -1854,7 +1854,7 @@
           <a:p>
             <a:fld id="{5BCAD085-E8A6-8845-BD4E-CB4CCA059FC4}" type="datetimeFigureOut">
               <a:rPr lang="en-US" smtClean="0"/>
-              <a:t>6/18/2026</a:t>
+              <a:t>6/20/2026</a:t>
             </a:fld>
             <a:endParaRPr lang="en-US"/>
           </a:p>
@@ -1896,7 +1896,7 @@
           <a:p>
             <a:fld id="{C1FF6DA9-008F-8B48-92A6-B652298478BF}" type="slidenum">
               <a:rPr lang="en-US" smtClean="0"/>
-              <a:t>‹#›</a:t>
+              <a:t>‹Nr.›</a:t>
             </a:fld>
             <a:endParaRPr lang="en-US"/>
           </a:p>
@@ -2032,7 +2032,7 @@
           <a:p>
             <a:fld id="{5BCAD085-E8A6-8845-BD4E-CB4CCA059FC4}" type="datetimeFigureOut">
               <a:rPr lang="en-US" smtClean="0"/>
-              <a:t>6/18/2026</a:t>
+              <a:t>6/20/2026</a:t>
             </a:fld>
             <a:endParaRPr lang="en-US"/>
           </a:p>
@@ -2074,7 +2074,7 @@
           <a:p>
             <a:fld id="{C1FF6DA9-008F-8B48-92A6-B652298478BF}" type="slidenum">
               <a:rPr lang="en-US" smtClean="0"/>
-              <a:t>‹#›</a:t>
+              <a:t>‹Nr.›</a:t>
             </a:fld>
             <a:endParaRPr lang="en-US"/>
           </a:p>
@@ -2200,7 +2200,7 @@
           <a:p>
             <a:fld id="{5BCAD085-E8A6-8845-BD4E-CB4CCA059FC4}" type="datetimeFigureOut">
               <a:rPr lang="en-US" smtClean="0"/>
-              <a:t>6/18/2026</a:t>
+              <a:t>6/20/2026</a:t>
             </a:fld>
             <a:endParaRPr lang="en-US"/>
           </a:p>
@@ -2242,7 +2242,7 @@
           <a:p>
             <a:fld id="{C1FF6DA9-008F-8B48-92A6-B652298478BF}" type="slidenum">
               <a:rPr lang="en-US" smtClean="0"/>
-              <a:t>‹#›</a:t>
+              <a:t>‹Nr.›</a:t>
             </a:fld>
             <a:endParaRPr lang="en-US"/>
           </a:p>
@@ -2445,7 +2445,7 @@
           <a:p>
             <a:fld id="{5BCAD085-E8A6-8845-BD4E-CB4CCA059FC4}" type="datetimeFigureOut">
               <a:rPr lang="en-US" smtClean="0"/>
-              <a:t>6/18/2026</a:t>
+              <a:t>6/20/2026</a:t>
             </a:fld>
             <a:endParaRPr lang="en-US"/>
           </a:p>
@@ -2487,7 +2487,7 @@
           <a:p>
             <a:fld id="{C1FF6DA9-008F-8B48-92A6-B652298478BF}" type="slidenum">
               <a:rPr lang="en-US" smtClean="0"/>
-              <a:t>‹#›</a:t>
+              <a:t>‹Nr.›</a:t>
             </a:fld>
             <a:endParaRPr lang="en-US"/>
           </a:p>
@@ -2730,7 +2730,7 @@
           <a:p>
             <a:fld id="{5BCAD085-E8A6-8845-BD4E-CB4CCA059FC4}" type="datetimeFigureOut">
               <a:rPr lang="en-US" smtClean="0"/>
-              <a:t>6/18/2026</a:t>
+              <a:t>6/20/2026</a:t>
             </a:fld>
             <a:endParaRPr lang="en-US"/>
           </a:p>
@@ -2772,7 +2772,7 @@
           <a:p>
             <a:fld id="{C1FF6DA9-008F-8B48-92A6-B652298478BF}" type="slidenum">
               <a:rPr lang="en-US" smtClean="0"/>
-              <a:t>‹#›</a:t>
+              <a:t>‹Nr.›</a:t>
             </a:fld>
             <a:endParaRPr lang="en-US"/>
           </a:p>
@@ -3149,7 +3149,7 @@
           <a:p>
             <a:fld id="{5BCAD085-E8A6-8845-BD4E-CB4CCA059FC4}" type="datetimeFigureOut">
               <a:rPr lang="en-US" smtClean="0"/>
-              <a:t>6/18/2026</a:t>
+              <a:t>6/20/2026</a:t>
             </a:fld>
             <a:endParaRPr lang="en-US"/>
           </a:p>
@@ -3191,7 +3191,7 @@
           <a:p>
             <a:fld id="{C1FF6DA9-008F-8B48-92A6-B652298478BF}" type="slidenum">
               <a:rPr lang="en-US" smtClean="0"/>
-              <a:t>‹#›</a:t>
+              <a:t>‹Nr.›</a:t>
             </a:fld>
             <a:endParaRPr lang="en-US"/>
           </a:p>
@@ -3266,7 +3266,7 @@
           <a:p>
             <a:fld id="{5BCAD085-E8A6-8845-BD4E-CB4CCA059FC4}" type="datetimeFigureOut">
               <a:rPr lang="en-US" smtClean="0"/>
-              <a:t>6/18/2026</a:t>
+              <a:t>6/20/2026</a:t>
             </a:fld>
             <a:endParaRPr lang="en-US"/>
           </a:p>
@@ -3308,7 +3308,7 @@
           <a:p>
             <a:fld id="{C1FF6DA9-008F-8B48-92A6-B652298478BF}" type="slidenum">
               <a:rPr lang="en-US" smtClean="0"/>
-              <a:t>‹#›</a:t>
+              <a:t>‹Nr.›</a:t>
             </a:fld>
             <a:endParaRPr lang="en-US"/>
           </a:p>
@@ -3361,7 +3361,7 @@
           <a:p>
             <a:fld id="{5BCAD085-E8A6-8845-BD4E-CB4CCA059FC4}" type="datetimeFigureOut">
               <a:rPr lang="en-US" smtClean="0"/>
-              <a:t>6/18/2026</a:t>
+              <a:t>6/20/2026</a:t>
             </a:fld>
             <a:endParaRPr lang="en-US"/>
           </a:p>
@@ -3403,7 +3403,7 @@
           <a:p>
             <a:fld id="{C1FF6DA9-008F-8B48-92A6-B652298478BF}" type="slidenum">
               <a:rPr lang="en-US" smtClean="0"/>
-              <a:t>‹#›</a:t>
+              <a:t>‹Nr.›</a:t>
             </a:fld>
             <a:endParaRPr lang="en-US"/>
           </a:p>
@@ -3636,7 +3636,7 @@
           <a:p>
             <a:fld id="{5BCAD085-E8A6-8845-BD4E-CB4CCA059FC4}" type="datetimeFigureOut">
               <a:rPr lang="en-US" smtClean="0"/>
-              <a:t>6/18/2026</a:t>
+              <a:t>6/20/2026</a:t>
             </a:fld>
             <a:endParaRPr lang="en-US"/>
           </a:p>
@@ -3678,7 +3678,7 @@
           <a:p>
             <a:fld id="{C1FF6DA9-008F-8B48-92A6-B652298478BF}" type="slidenum">
               <a:rPr lang="en-US" smtClean="0"/>
-              <a:t>‹#›</a:t>
+              <a:t>‹Nr.›</a:t>
             </a:fld>
             <a:endParaRPr lang="en-US"/>
           </a:p>
@@ -3888,7 +3888,7 @@
           <a:p>
             <a:fld id="{5BCAD085-E8A6-8845-BD4E-CB4CCA059FC4}" type="datetimeFigureOut">
               <a:rPr lang="en-US" smtClean="0"/>
-              <a:t>6/18/2026</a:t>
+              <a:t>6/20/2026</a:t>
             </a:fld>
             <a:endParaRPr lang="en-US"/>
           </a:p>
@@ -3930,7 +3930,7 @@
           <a:p>
             <a:fld id="{C1FF6DA9-008F-8B48-92A6-B652298478BF}" type="slidenum">
               <a:rPr lang="en-US" smtClean="0"/>
-              <a:t>‹#›</a:t>
+              <a:t>‹Nr.›</a:t>
             </a:fld>
             <a:endParaRPr lang="en-US"/>
           </a:p>
@@ -4099,7 +4099,7 @@
           <a:p>
             <a:fld id="{5BCAD085-E8A6-8845-BD4E-CB4CCA059FC4}" type="datetimeFigureOut">
               <a:rPr lang="en-US" smtClean="0"/>
-              <a:t>6/18/2026</a:t>
+              <a:t>6/20/2026</a:t>
             </a:fld>
             <a:endParaRPr lang="en-US"/>
           </a:p>
@@ -4177,7 +4177,7 @@
           <a:p>
             <a:fld id="{C1FF6DA9-008F-8B48-92A6-B652298478BF}" type="slidenum">
               <a:rPr lang="en-US" smtClean="0"/>
-              <a:t>‹#›</a:t>
+              <a:t>‹Nr.›</a:t>
             </a:fld>
             <a:endParaRPr lang="en-US"/>
           </a:p>
@@ -9357,7 +9357,7 @@
         <p:spPr>
           <a:xfrm>
             <a:off x="7726679" y="4023360"/>
-            <a:ext cx="3931920" cy="1371600"/>
+            <a:ext cx="3931920" cy="923330"/>
           </a:xfrm>
           <a:prstGeom prst="rect">
             <a:avLst/>
@@ -9376,13 +9376,58 @@
               </a:spcBef>
             </a:pPr>
             <a:r>
-              <a:rPr sz="1100">
-                <a:solidFill>
-                  <a:srgbClr val="444444"/>
-                </a:solidFill>
-              </a:rPr>
-              <a:t>•  Echtes API-Verhalten getestet</a:t>
-            </a:r>
+              <a:rPr sz="1100" dirty="0">
+                <a:solidFill>
+                  <a:srgbClr val="444444"/>
+                </a:solidFill>
+              </a:rPr>
+              <a:t>•  </a:t>
+            </a:r>
+            <a:r>
+              <a:rPr sz="1100" dirty="0" err="1">
+                <a:solidFill>
+                  <a:srgbClr val="444444"/>
+                </a:solidFill>
+              </a:rPr>
+              <a:t>Echtes</a:t>
+            </a:r>
+            <a:r>
+              <a:rPr sz="1100" dirty="0">
+                <a:solidFill>
+                  <a:srgbClr val="444444"/>
+                </a:solidFill>
+              </a:rPr>
+              <a:t> API-</a:t>
+            </a:r>
+            <a:r>
+              <a:rPr sz="1100" dirty="0" err="1">
+                <a:solidFill>
+                  <a:srgbClr val="444444"/>
+                </a:solidFill>
+              </a:rPr>
+              <a:t>Verhalten</a:t>
+            </a:r>
+            <a:r>
+              <a:rPr sz="1100" dirty="0">
+                <a:solidFill>
+                  <a:srgbClr val="444444"/>
+                </a:solidFill>
+              </a:rPr>
+              <a:t> </a:t>
+            </a:r>
+            <a:r>
+              <a:rPr sz="1100" dirty="0" err="1">
+                <a:solidFill>
+                  <a:srgbClr val="444444"/>
+                </a:solidFill>
+              </a:rPr>
+              <a:t>getestet</a:t>
+            </a:r>
+            <a:endParaRPr sz="1100" dirty="0">
+              <a:solidFill>
+                <a:srgbClr val="444444"/>
+              </a:solidFill>
+            </a:endParaRPr>
           </a:p>
           <a:p>
             <a:pPr>
@@ -9391,7 +9436,7 @@
               </a:spcBef>
             </a:pPr>
             <a:r>
-              <a:rPr sz="1100">
+              <a:rPr sz="1100" dirty="0">
                 <a:solidFill>
                   <a:srgbClr val="444444"/>
                 </a:solidFill>
@@ -9406,13 +9451,50 @@
               </a:spcBef>
             </a:pPr>
             <a:r>
-              <a:rPr sz="1100">
-                <a:solidFill>
-                  <a:srgbClr val="444444"/>
-                </a:solidFill>
-              </a:rPr>
-              <a:t>•  Geschäftslogik verifiziert</a:t>
-            </a:r>
+              <a:rPr sz="1100" dirty="0">
+                <a:solidFill>
+                  <a:srgbClr val="444444"/>
+                </a:solidFill>
+              </a:rPr>
+              <a:t>•  </a:t>
+            </a:r>
+            <a:r>
+              <a:rPr lang="de-AT" sz="1100" dirty="0">
+                <a:solidFill>
+                  <a:srgbClr val="444444"/>
+                </a:solidFill>
+              </a:rPr>
+              <a:t>Business</a:t>
+            </a:r>
+            <a:r>
+              <a:rPr sz="1100" dirty="0" err="1">
+                <a:solidFill>
+                  <a:srgbClr val="444444"/>
+                </a:solidFill>
+              </a:rPr>
+              <a:t>logik</a:t>
+            </a:r>
+            <a:r>
+              <a:rPr sz="1100" dirty="0">
+                <a:solidFill>
+                  <a:srgbClr val="444444"/>
+                </a:solidFill>
+              </a:rPr>
+              <a:t> </a:t>
+            </a:r>
+            <a:r>
+              <a:rPr sz="1100" dirty="0" err="1">
+                <a:solidFill>
+                  <a:srgbClr val="444444"/>
+                </a:solidFill>
+              </a:rPr>
+              <a:t>verifiziert</a:t>
+            </a:r>
+            <a:endParaRPr sz="1100" dirty="0">
+              <a:solidFill>
+                <a:srgbClr val="444444"/>
+              </a:solidFill>
+            </a:endParaRPr>
           </a:p>
           <a:p>
             <a:pPr>
@@ -9421,13 +9503,26 @@
               </a:spcBef>
             </a:pPr>
             <a:r>
-              <a:rPr sz="1100">
-                <a:solidFill>
-                  <a:srgbClr val="444444"/>
-                </a:solidFill>
-              </a:rPr>
-              <a:t>•  Keine Warnungen</a:t>
-            </a:r>
+              <a:rPr sz="1100" dirty="0">
+                <a:solidFill>
+                  <a:srgbClr val="444444"/>
+                </a:solidFill>
+              </a:rPr>
+              <a:t>•  Keine </a:t>
+            </a:r>
+            <a:r>
+              <a:rPr sz="1100" dirty="0" err="1">
+                <a:solidFill>
+                  <a:srgbClr val="444444"/>
+                </a:solidFill>
+              </a:rPr>
+              <a:t>Warnungen</a:t>
+            </a:r>
+            <a:endParaRPr sz="1100" dirty="0">
+              <a:solidFill>
+                <a:srgbClr val="444444"/>
+              </a:solidFill>
+            </a:endParaRPr>
           </a:p>
         </p:txBody>
       </p:sp>
@@ -13083,7 +13178,7 @@
         <p:spPr>
           <a:xfrm>
             <a:off x="640080" y="2039112"/>
-            <a:ext cx="4846320" cy="658368"/>
+            <a:ext cx="4846320" cy="369332"/>
           </a:xfrm>
           <a:prstGeom prst="rect">
             <a:avLst/>
@@ -13098,14 +13193,156 @@
           <a:p>
             <a:pPr algn="l"/>
             <a:r>
-              <a:rPr sz="900" b="0" i="0">
-                <a:solidFill>
-                  <a:srgbClr val="444444"/>
-                </a:solidFill>
-              </a:rPr>
-              <a:t>Jeder Agent sieht nur seinen Ausschnitt.
-Der Developer kennt nur requirements.md –
-kein akkumuliertes Gesamtbild.</a:t>
+              <a:rPr sz="900" b="0" i="0" dirty="0" err="1">
+                <a:solidFill>
+                  <a:srgbClr val="444444"/>
+                </a:solidFill>
+              </a:rPr>
+              <a:t>Jeder</a:t>
+            </a:r>
+            <a:r>
+              <a:rPr sz="900" b="0" i="0" dirty="0">
+                <a:solidFill>
+                  <a:srgbClr val="444444"/>
+                </a:solidFill>
+              </a:rPr>
+              <a:t> Agent </a:t>
+            </a:r>
+            <a:r>
+              <a:rPr sz="900" b="0" i="0" dirty="0" err="1">
+                <a:solidFill>
+                  <a:srgbClr val="444444"/>
+                </a:solidFill>
+              </a:rPr>
+              <a:t>sieht</a:t>
+            </a:r>
+            <a:r>
+              <a:rPr sz="900" b="0" i="0" dirty="0">
+                <a:solidFill>
+                  <a:srgbClr val="444444"/>
+                </a:solidFill>
+              </a:rPr>
+              <a:t> </a:t>
+            </a:r>
+            <a:r>
+              <a:rPr sz="900" b="0" i="0" dirty="0" err="1">
+                <a:solidFill>
+                  <a:srgbClr val="444444"/>
+                </a:solidFill>
+              </a:rPr>
+              <a:t>nur</a:t>
+            </a:r>
+            <a:r>
+              <a:rPr sz="900" b="0" i="0" dirty="0">
+                <a:solidFill>
+                  <a:srgbClr val="444444"/>
+                </a:solidFill>
+              </a:rPr>
+              <a:t> seinen </a:t>
+            </a:r>
+            <a:r>
+              <a:rPr sz="900" b="0" i="0" dirty="0" err="1">
+                <a:solidFill>
+                  <a:srgbClr val="444444"/>
+                </a:solidFill>
+              </a:rPr>
+              <a:t>Ausschnitt</a:t>
+            </a:r>
+            <a:r>
+              <a:rPr sz="900" b="0" i="0" dirty="0">
+                <a:solidFill>
+                  <a:srgbClr val="444444"/>
+                </a:solidFill>
+              </a:rPr>
+              <a:t>.</a:t>
+            </a:r>
+            <a:endParaRPr lang="de-AT" sz="900" dirty="0">
+              <a:solidFill>
+                <a:srgbClr val="444444"/>
+              </a:solidFill>
+            </a:endParaRPr>
+          </a:p>
+          <a:p>
+            <a:pPr algn="l"/>
+            <a:r>
+              <a:rPr sz="900" b="0" i="0" dirty="0">
+                <a:solidFill>
+                  <a:srgbClr val="444444"/>
+                </a:solidFill>
+              </a:rPr>
+              <a:t>Developer </a:t>
+            </a:r>
+            <a:r>
+              <a:rPr sz="900" b="0" i="0" dirty="0" err="1">
+                <a:solidFill>
+                  <a:srgbClr val="444444"/>
+                </a:solidFill>
+              </a:rPr>
+              <a:t>kennt</a:t>
+            </a:r>
+            <a:r>
+              <a:rPr sz="900" b="0" i="0" dirty="0">
+                <a:solidFill>
+                  <a:srgbClr val="444444"/>
+                </a:solidFill>
+              </a:rPr>
+              <a:t> </a:t>
+            </a:r>
+            <a:r>
+              <a:rPr sz="900" b="0" i="0" dirty="0" err="1">
+                <a:solidFill>
+                  <a:srgbClr val="444444"/>
+                </a:solidFill>
+              </a:rPr>
+              <a:t>nur</a:t>
+            </a:r>
+            <a:r>
+              <a:rPr sz="900" b="0" i="0" dirty="0">
+                <a:solidFill>
+                  <a:srgbClr val="444444"/>
+                </a:solidFill>
+              </a:rPr>
+              <a:t> requirements.md –</a:t>
+            </a:r>
+            <a:r>
+              <a:rPr lang="de-AT" sz="900" b="0" i="0" dirty="0">
+                <a:solidFill>
+                  <a:srgbClr val="444444"/>
+                </a:solidFill>
+              </a:rPr>
+              <a:t> </a:t>
+            </a:r>
+            <a:r>
+              <a:rPr sz="900" b="0" i="0" dirty="0" err="1">
+                <a:solidFill>
+                  <a:srgbClr val="444444"/>
+                </a:solidFill>
+              </a:rPr>
+              <a:t>kein</a:t>
+            </a:r>
+            <a:r>
+              <a:rPr sz="900" b="0" i="0" dirty="0">
+                <a:solidFill>
+                  <a:srgbClr val="444444"/>
+                </a:solidFill>
+              </a:rPr>
+              <a:t> </a:t>
+            </a:r>
+            <a:r>
+              <a:rPr sz="900" b="0" i="0" dirty="0" err="1">
+                <a:solidFill>
+                  <a:srgbClr val="444444"/>
+                </a:solidFill>
+              </a:rPr>
+              <a:t>Gesamtbild</a:t>
+            </a:r>
+            <a:r>
+              <a:rPr sz="900" b="0" i="0" dirty="0">
+                <a:solidFill>
+                  <a:srgbClr val="444444"/>
+                </a:solidFill>
+              </a:rPr>
+              <a:t>.</a:t>
             </a:r>
           </a:p>
         </p:txBody>
@@ -13165,7 +13402,7 @@
         <p:spPr>
           <a:xfrm>
             <a:off x="640080" y="2889504"/>
-            <a:ext cx="4846320" cy="256032"/>
+            <a:ext cx="4846320" cy="261610"/>
           </a:xfrm>
           <a:prstGeom prst="rect">
             <a:avLst/>
@@ -13180,13 +13417,26 @@
           <a:p>
             <a:pPr algn="l"/>
             <a:r>
-              <a:rPr sz="1100" b="1" i="0">
+              <a:rPr lang="de-AT" sz="1100" b="1" dirty="0" err="1">
                 <a:solidFill>
                   <a:srgbClr val="E86A0A"/>
                 </a:solidFill>
               </a:rPr>
-              <a:t>Kein gemeinsames Qualitätsbewusstsein</a:t>
-            </a:r>
+              <a:t>Kommunikations</a:t>
+            </a:r>
+            <a:r>
+              <a:rPr lang="de-AT" sz="1100" b="1" dirty="0">
+                <a:solidFill>
+                  <a:srgbClr val="E86A0A"/>
+                </a:solidFill>
+              </a:rPr>
+              <a:t> - Overhead</a:t>
+            </a:r>
+            <a:endParaRPr sz="1100" b="1" i="0" dirty="0">
+              <a:solidFill>
+                <a:srgbClr val="E86A0A"/>
+              </a:solidFill>
+            </a:endParaRPr>
           </a:p>
         </p:txBody>
       </p:sp>
@@ -13199,7 +13449,7 @@
         <p:spPr>
           <a:xfrm>
             <a:off x="640080" y="3154680"/>
-            <a:ext cx="4846320" cy="658368"/>
+            <a:ext cx="4846320" cy="507831"/>
           </a:xfrm>
           <a:prstGeom prst="rect">
             <a:avLst/>
@@ -13214,14 +13464,38 @@
           <a:p>
             <a:pPr algn="l"/>
             <a:r>
-              <a:rPr sz="900" b="0" i="0">
-                <a:solidFill>
-                  <a:srgbClr val="444444"/>
-                </a:solidFill>
-              </a:rPr>
-              <a:t>Niemand ist für deprecated Patterns verantwortlich.
-PO, Architect und Developer entscheiden unabhängig –
-ohne übergreifenden Code-Standard.</a:t>
+              <a:rPr lang="de-AT" sz="900" b="0" i="0" dirty="0">
+                <a:solidFill>
+                  <a:srgbClr val="444444"/>
+                </a:solidFill>
+              </a:rPr>
+              <a:t>Kontextweitergabe</a:t>
+            </a:r>
+            <a:r>
+              <a:rPr sz="900" b="0" i="0" dirty="0">
+                <a:solidFill>
+                  <a:srgbClr val="444444"/>
+                </a:solidFill>
+              </a:rPr>
+              <a:t>
+</a:t>
+            </a:r>
+            <a:r>
+              <a:rPr lang="de-AT" sz="900" b="0" i="0" dirty="0">
+                <a:solidFill>
+                  <a:srgbClr val="444444"/>
+                </a:solidFill>
+              </a:rPr>
+              <a:t>Entscheidungen Synchronisieren (erhöht Kosten &amp; Fehlerrisiko)</a:t>
+            </a:r>
+            <a:r>
+              <a:rPr sz="900" b="0" i="0" dirty="0">
+                <a:solidFill>
+                  <a:srgbClr val="444444"/>
+                </a:solidFill>
+              </a:rPr>
+              <a:t>
+</a:t>
             </a:r>
           </a:p>
         </p:txBody>
@@ -13543,7 +13817,7 @@
         <p:spPr>
           <a:xfrm>
             <a:off x="640080" y="5385816"/>
-            <a:ext cx="4846320" cy="658368"/>
+            <a:ext cx="4846320" cy="507831"/>
           </a:xfrm>
           <a:prstGeom prst="rect">
             <a:avLst/>
@@ -13558,14 +13832,142 @@
           <a:p>
             <a:pPr algn="l"/>
             <a:r>
-              <a:rPr sz="900" b="0" i="0">
+              <a:rPr sz="900" b="0" i="0" dirty="0">
                 <a:solidFill>
                   <a:srgbClr val="444444"/>
                 </a:solidFill>
               </a:rPr>
               <a:t>requirements.md → architecture.md → developer-prompt:
-Jede Übergabe verliert implizites Wissen,
-das ein Single-Agent einfach 'im Kopf behält'.</a:t>
+</a:t>
+            </a:r>
+            <a:r>
+              <a:rPr sz="900" b="0" i="0" dirty="0" err="1">
+                <a:solidFill>
+                  <a:srgbClr val="444444"/>
+                </a:solidFill>
+              </a:rPr>
+              <a:t>Jede</a:t>
+            </a:r>
+            <a:r>
+              <a:rPr sz="900" b="0" i="0" dirty="0">
+                <a:solidFill>
+                  <a:srgbClr val="444444"/>
+                </a:solidFill>
+              </a:rPr>
+              <a:t> </a:t>
+            </a:r>
+            <a:r>
+              <a:rPr sz="900" b="0" i="0" dirty="0" err="1">
+                <a:solidFill>
+                  <a:srgbClr val="444444"/>
+                </a:solidFill>
+              </a:rPr>
+              <a:t>Übergabe</a:t>
+            </a:r>
+            <a:r>
+              <a:rPr sz="900" b="0" i="0" dirty="0">
+                <a:solidFill>
+                  <a:srgbClr val="444444"/>
+                </a:solidFill>
+              </a:rPr>
+              <a:t> </a:t>
+            </a:r>
+            <a:r>
+              <a:rPr sz="900" b="0" i="0" dirty="0" err="1">
+                <a:solidFill>
+                  <a:srgbClr val="444444"/>
+                </a:solidFill>
+              </a:rPr>
+              <a:t>verliert</a:t>
+            </a:r>
+            <a:r>
+              <a:rPr sz="900" b="0" i="0" dirty="0">
+                <a:solidFill>
+                  <a:srgbClr val="444444"/>
+                </a:solidFill>
+              </a:rPr>
+              <a:t> Wissen,
+das </a:t>
+            </a:r>
+            <a:r>
+              <a:rPr sz="900" b="0" i="0" dirty="0" err="1">
+                <a:solidFill>
+                  <a:srgbClr val="444444"/>
+                </a:solidFill>
+              </a:rPr>
+              <a:t>ein</a:t>
+            </a:r>
+            <a:r>
+              <a:rPr sz="900" b="0" i="0" dirty="0">
+                <a:solidFill>
+                  <a:srgbClr val="444444"/>
+                </a:solidFill>
+              </a:rPr>
+              <a:t> Single-Agent</a:t>
+            </a:r>
+            <a:r>
+              <a:rPr lang="de-AT" sz="900" b="0" i="0" dirty="0">
+                <a:solidFill>
+                  <a:srgbClr val="444444"/>
+                </a:solidFill>
+              </a:rPr>
+              <a:t> bei kleineren Projekten</a:t>
+            </a:r>
+            <a:r>
+              <a:rPr sz="900" b="0" i="0" dirty="0">
+                <a:solidFill>
+                  <a:srgbClr val="444444"/>
+                </a:solidFill>
+              </a:rPr>
+              <a:t> </a:t>
+            </a:r>
+            <a:r>
+              <a:rPr sz="900" b="0" i="0" dirty="0" err="1">
+                <a:solidFill>
+                  <a:srgbClr val="444444"/>
+                </a:solidFill>
+              </a:rPr>
+              <a:t>einfach</a:t>
+            </a:r>
+            <a:r>
+              <a:rPr sz="900" b="0" i="0" dirty="0">
+                <a:solidFill>
+                  <a:srgbClr val="444444"/>
+                </a:solidFill>
+              </a:rPr>
+              <a:t> '</a:t>
+            </a:r>
+            <a:r>
+              <a:rPr sz="900" b="0" i="0" dirty="0" err="1">
+                <a:solidFill>
+                  <a:srgbClr val="444444"/>
+                </a:solidFill>
+              </a:rPr>
+              <a:t>im</a:t>
+            </a:r>
+            <a:r>
+              <a:rPr sz="900" b="0" i="0" dirty="0">
+                <a:solidFill>
+                  <a:srgbClr val="444444"/>
+                </a:solidFill>
+              </a:rPr>
+              <a:t> Kopf </a:t>
+            </a:r>
+            <a:r>
+              <a:rPr sz="900" b="0" i="0" dirty="0" err="1">
+                <a:solidFill>
+                  <a:srgbClr val="444444"/>
+                </a:solidFill>
+              </a:rPr>
+              <a:t>behält</a:t>
+            </a:r>
+            <a:r>
+              <a:rPr sz="900" b="0" i="0" dirty="0">
+                <a:solidFill>
+                  <a:srgbClr val="444444"/>
+                </a:solidFill>
+              </a:rPr>
+              <a:t>'.</a:t>
             </a:r>
           </a:p>
         </p:txBody>
@@ -14674,7 +15076,7 @@
               </a:spcBef>
             </a:pPr>
             <a:r>
-              <a:rPr sz="1200">
+              <a:rPr sz="1200" dirty="0">
                 <a:solidFill>
                   <a:srgbClr val="444444"/>
                 </a:solidFill>
@@ -14682,7 +15084,7 @@
               <a:t>•  Mehr </a:t>
             </a:r>
             <a:r>
-              <a:rPr sz="1200" err="1">
+              <a:rPr sz="1200" dirty="0" err="1">
                 <a:solidFill>
                   <a:srgbClr val="444444"/>
                 </a:solidFill>
@@ -14690,7 +15092,7 @@
               <a:t>Agenten</a:t>
             </a:r>
             <a:r>
-              <a:rPr sz="1200">
+              <a:rPr sz="1200" dirty="0">
                 <a:solidFill>
                   <a:srgbClr val="444444"/>
                 </a:solidFill>
@@ -14698,7 +15100,7 @@
               <a:t> ≠ </a:t>
             </a:r>
             <a:r>
-              <a:rPr sz="1200" err="1">
+              <a:rPr sz="1200" dirty="0" err="1">
                 <a:solidFill>
                   <a:srgbClr val="444444"/>
                 </a:solidFill>
@@ -14706,7 +15108,7 @@
               <a:t>bessere</a:t>
             </a:r>
             <a:r>
-              <a:rPr sz="1200">
+              <a:rPr sz="1200" dirty="0">
                 <a:solidFill>
                   <a:srgbClr val="444444"/>
                 </a:solidFill>
@@ -14714,14 +15116,14 @@
               <a:t> </a:t>
             </a:r>
             <a:r>
-              <a:rPr sz="1200" err="1">
+              <a:rPr sz="1200" dirty="0" err="1">
                 <a:solidFill>
                   <a:srgbClr val="444444"/>
                 </a:solidFill>
               </a:rPr>
               <a:t>Ergebnisse</a:t>
             </a:r>
-            <a:endParaRPr sz="1200">
+            <a:endParaRPr sz="1200" dirty="0">
               <a:solidFill>
                 <a:srgbClr val="444444"/>
               </a:solidFill>
@@ -14734,7 +15136,7 @@
               </a:spcBef>
             </a:pPr>
             <a:r>
-              <a:rPr sz="1200">
+              <a:rPr sz="1200" dirty="0">
                 <a:solidFill>
                   <a:srgbClr val="444444"/>
                 </a:solidFill>
@@ -14742,7 +15144,7 @@
               <a:t>•  </a:t>
             </a:r>
             <a:r>
-              <a:rPr sz="1200" err="1">
+              <a:rPr sz="1200" dirty="0" err="1">
                 <a:solidFill>
                   <a:srgbClr val="444444"/>
                 </a:solidFill>
@@ -14750,7 +15152,7 @@
               <a:t>Kontext-Fragmentierung</a:t>
             </a:r>
             <a:r>
-              <a:rPr sz="1200">
+              <a:rPr sz="1200" dirty="0">
                 <a:solidFill>
                   <a:srgbClr val="444444"/>
                 </a:solidFill>
@@ -14758,7 +15160,7 @@
               <a:t> </a:t>
             </a:r>
             <a:r>
-              <a:rPr sz="1200" err="1">
+              <a:rPr sz="1200" dirty="0" err="1">
                 <a:solidFill>
                   <a:srgbClr val="444444"/>
                 </a:solidFill>
@@ -14766,7 +15168,7 @@
               <a:t>senkt</a:t>
             </a:r>
             <a:r>
-              <a:rPr sz="1200">
+              <a:rPr sz="1200" dirty="0">
                 <a:solidFill>
                   <a:srgbClr val="444444"/>
                 </a:solidFill>
@@ -14781,7 +15183,7 @@
               </a:spcBef>
             </a:pPr>
             <a:r>
-              <a:rPr sz="1200">
+              <a:rPr sz="1200" dirty="0">
                 <a:solidFill>
                   <a:srgbClr val="444444"/>
                 </a:solidFill>
@@ -14789,7 +15191,7 @@
               <a:t>•  State-</a:t>
             </a:r>
             <a:r>
-              <a:rPr sz="1200" err="1">
+              <a:rPr sz="1200" dirty="0" err="1">
                 <a:solidFill>
                   <a:srgbClr val="444444"/>
                 </a:solidFill>
@@ -14797,7 +15199,7 @@
               <a:t>Weitergabe</a:t>
             </a:r>
             <a:r>
-              <a:rPr sz="1200">
+              <a:rPr sz="1200" dirty="0">
                 <a:solidFill>
                   <a:srgbClr val="444444"/>
                 </a:solidFill>
@@ -14805,7 +15207,7 @@
               <a:t> </a:t>
             </a:r>
             <a:r>
-              <a:rPr sz="1200" err="1">
+              <a:rPr sz="1200" dirty="0" err="1">
                 <a:solidFill>
                   <a:srgbClr val="444444"/>
                 </a:solidFill>
@@ -14813,7 +15215,7 @@
               <a:t>kostet</a:t>
             </a:r>
             <a:r>
-              <a:rPr sz="1200">
+              <a:rPr sz="1200" dirty="0">
                 <a:solidFill>
                   <a:srgbClr val="444444"/>
                 </a:solidFill>
@@ -14821,7 +15223,7 @@
               <a:t> </a:t>
             </a:r>
             <a:r>
-              <a:rPr sz="1200" err="1">
+              <a:rPr sz="1200" dirty="0" err="1">
                 <a:solidFill>
                   <a:srgbClr val="444444"/>
                 </a:solidFill>
@@ -14829,7 +15231,7 @@
               <a:t>exponentiell</a:t>
             </a:r>
             <a:r>
-              <a:rPr sz="1200">
+              <a:rPr sz="1200" dirty="0">
                 <a:solidFill>
                   <a:srgbClr val="444444"/>
                 </a:solidFill>
@@ -14844,7 +15246,7 @@
               </a:spcBef>
             </a:pPr>
             <a:r>
-              <a:rPr sz="1200">
+              <a:rPr sz="1200" dirty="0">
                 <a:solidFill>
                   <a:srgbClr val="444444"/>
                 </a:solidFill>
@@ -14852,46 +15254,14 @@
               <a:t>•  Single-Agent hat </a:t>
             </a:r>
             <a:r>
-              <a:rPr sz="1200" err="1">
-                <a:solidFill>
-                  <a:srgbClr val="444444"/>
-                </a:solidFill>
-              </a:rPr>
-              <a:t>natürlich</a:t>
-            </a:r>
-            <a:r>
-              <a:rPr sz="1200">
-                <a:solidFill>
-                  <a:srgbClr val="444444"/>
-                </a:solidFill>
-              </a:rPr>
-              <a:t> </a:t>
-            </a:r>
-            <a:r>
-              <a:rPr sz="1200" err="1">
-                <a:solidFill>
-                  <a:srgbClr val="444444"/>
-                </a:solidFill>
-              </a:rPr>
-              <a:t>gewachsenen</a:t>
-            </a:r>
-            <a:r>
-              <a:rPr sz="1200">
-                <a:solidFill>
-                  <a:srgbClr val="444444"/>
-                </a:solidFill>
-              </a:rPr>
-              <a:t> </a:t>
-            </a:r>
-            <a:r>
-              <a:rPr sz="1200" err="1">
+              <a:rPr sz="1200" dirty="0" err="1">
                 <a:solidFill>
                   <a:srgbClr val="444444"/>
                 </a:solidFill>
               </a:rPr>
               <a:t>Gesamt-Kontext</a:t>
             </a:r>
-            <a:endParaRPr sz="1200">
+            <a:endParaRPr sz="1200" dirty="0">
               <a:solidFill>
                 <a:srgbClr val="444444"/>
               </a:solidFill>
@@ -14904,7 +15274,7 @@
               </a:spcBef>
             </a:pPr>
             <a:r>
-              <a:rPr sz="1200">
+              <a:rPr sz="1200" dirty="0">
                 <a:solidFill>
                   <a:srgbClr val="444444"/>
                 </a:solidFill>
@@ -14912,7 +15282,7 @@
               <a:t>•  Reviewer-Loop </a:t>
             </a:r>
             <a:r>
-              <a:rPr sz="1200" err="1">
+              <a:rPr sz="1200" dirty="0" err="1">
                 <a:solidFill>
                   <a:srgbClr val="444444"/>
                 </a:solidFill>
@@ -14920,7 +15290,7 @@
               <a:t>funktioniert</a:t>
             </a:r>
             <a:r>
-              <a:rPr sz="1200">
+              <a:rPr sz="1200" dirty="0">
                 <a:solidFill>
                   <a:srgbClr val="444444"/>
                 </a:solidFill>
@@ -14928,7 +15298,7 @@
               <a:t>, </a:t>
             </a:r>
             <a:r>
-              <a:rPr sz="1200" err="1">
+              <a:rPr sz="1200" dirty="0" err="1">
                 <a:solidFill>
                   <a:srgbClr val="444444"/>
                 </a:solidFill>
@@ -14936,7 +15306,7 @@
               <a:t>greift</a:t>
             </a:r>
             <a:r>
-              <a:rPr sz="1200">
+              <a:rPr sz="1200" dirty="0">
                 <a:solidFill>
                   <a:srgbClr val="444444"/>
                 </a:solidFill>
@@ -14944,7 +15314,7 @@
               <a:t> </a:t>
             </a:r>
             <a:r>
-              <a:rPr sz="1200" err="1">
+              <a:rPr sz="1200" dirty="0" err="1">
                 <a:solidFill>
                   <a:srgbClr val="444444"/>
                 </a:solidFill>
@@ -14952,7 +15322,7 @@
               <a:t>aber</a:t>
             </a:r>
             <a:r>
-              <a:rPr sz="1200">
+              <a:rPr sz="1200" dirty="0">
                 <a:solidFill>
                   <a:srgbClr val="444444"/>
                 </a:solidFill>
@@ -14960,7 +15330,7 @@
               <a:t> </a:t>
             </a:r>
             <a:r>
-              <a:rPr sz="1200" err="1">
+              <a:rPr sz="1200" dirty="0" err="1">
                 <a:solidFill>
                   <a:srgbClr val="444444"/>
                 </a:solidFill>
@@ -14968,7 +15338,7 @@
               <a:t>zu</a:t>
             </a:r>
             <a:r>
-              <a:rPr sz="1200">
+              <a:rPr sz="1200" dirty="0">
                 <a:solidFill>
                   <a:srgbClr val="444444"/>
                 </a:solidFill>
@@ -14976,14 +15346,14 @@
               <a:t> </a:t>
             </a:r>
             <a:r>
-              <a:rPr sz="1200" err="1">
+              <a:rPr sz="1200" dirty="0" err="1">
                 <a:solidFill>
                   <a:srgbClr val="444444"/>
                 </a:solidFill>
               </a:rPr>
               <a:t>spät</a:t>
             </a:r>
-            <a:endParaRPr sz="1200">
+            <a:endParaRPr sz="1200" dirty="0">
               <a:solidFill>
                 <a:srgbClr val="444444"/>
               </a:solidFill>
@@ -14996,7 +15366,7 @@
               </a:spcBef>
             </a:pPr>
             <a:r>
-              <a:rPr sz="1200">
+              <a:rPr sz="1200" dirty="0">
                 <a:solidFill>
                   <a:srgbClr val="444444"/>
                 </a:solidFill>
@@ -15004,7 +15374,7 @@
               <a:t>•  Kosten </a:t>
             </a:r>
             <a:r>
-              <a:rPr sz="1200" err="1">
+              <a:rPr sz="1200" dirty="0" err="1">
                 <a:solidFill>
                   <a:srgbClr val="444444"/>
                 </a:solidFill>
@@ -15012,7 +15382,7 @@
               <a:t>skalieren</a:t>
             </a:r>
             <a:r>
-              <a:rPr sz="1200">
+              <a:rPr sz="1200" dirty="0">
                 <a:solidFill>
                   <a:srgbClr val="444444"/>
                 </a:solidFill>
@@ -15020,7 +15390,7 @@
               <a:t> stark </a:t>
             </a:r>
             <a:r>
-              <a:rPr sz="1200" err="1">
+              <a:rPr sz="1200" dirty="0" err="1">
                 <a:solidFill>
                   <a:srgbClr val="444444"/>
                 </a:solidFill>
@@ -15028,7 +15398,7 @@
               <a:t>mit</a:t>
             </a:r>
             <a:r>
-              <a:rPr sz="1200">
+              <a:rPr sz="1200" dirty="0">
                 <a:solidFill>
                   <a:srgbClr val="444444"/>
                 </a:solidFill>
@@ -15036,7 +15406,7 @@
               <a:t> </a:t>
             </a:r>
             <a:r>
-              <a:rPr sz="1200" err="1">
+              <a:rPr sz="1200" dirty="0" err="1">
                 <a:solidFill>
                   <a:srgbClr val="444444"/>
                 </a:solidFill>
@@ -15044,7 +15414,7 @@
               <a:t>Agentenzahl</a:t>
             </a:r>
             <a:r>
-              <a:rPr sz="1200">
+              <a:rPr sz="1200" dirty="0">
                 <a:solidFill>
                   <a:srgbClr val="444444"/>
                 </a:solidFill>
@@ -15052,14 +15422,14 @@
               <a:t> (~300 API-Calls</a:t>
             </a:r>
             <a:r>
-              <a:rPr lang="de-AT" sz="1200">
+              <a:rPr lang="de-AT" sz="1200" dirty="0">
                 <a:solidFill>
                   <a:srgbClr val="444444"/>
                 </a:solidFill>
               </a:rPr>
               <a:t>)</a:t>
             </a:r>
-            <a:endParaRPr sz="1200">
+            <a:endParaRPr sz="1200" dirty="0">
               <a:solidFill>
                 <a:srgbClr val="444444"/>
               </a:solidFill>
@@ -15072,7 +15442,7 @@
               </a:spcBef>
             </a:pPr>
             <a:r>
-              <a:rPr sz="1200">
+              <a:rPr sz="1200" dirty="0">
                 <a:solidFill>
                   <a:srgbClr val="444444"/>
                 </a:solidFill>
@@ -15080,7 +15450,7 @@
               <a:t>•  Langer Weg bis </a:t>
             </a:r>
             <a:r>
-              <a:rPr sz="1200" err="1">
+              <a:rPr sz="1200" dirty="0" err="1">
                 <a:solidFill>
                   <a:srgbClr val="444444"/>
                 </a:solidFill>
@@ -15088,7 +15458,7 @@
               <a:t>zum</a:t>
             </a:r>
             <a:r>
-              <a:rPr sz="1200">
+              <a:rPr sz="1200" dirty="0">
                 <a:solidFill>
                   <a:srgbClr val="444444"/>
                 </a:solidFill>
@@ -15096,7 +15466,7 @@
               <a:t> </a:t>
             </a:r>
             <a:r>
-              <a:rPr sz="1200" err="1">
+              <a:rPr sz="1200" dirty="0" err="1">
                 <a:solidFill>
                   <a:srgbClr val="444444"/>
                 </a:solidFill>
@@ -15104,7 +15474,7 @@
               <a:t>stabilen</a:t>
             </a:r>
             <a:r>
-              <a:rPr sz="1200">
+              <a:rPr sz="1200" dirty="0">
                 <a:solidFill>
                   <a:srgbClr val="444444"/>
                 </a:solidFill>
@@ -15119,7 +15489,7 @@
               </a:spcBef>
             </a:pPr>
             <a:r>
-              <a:rPr sz="1200">
+              <a:rPr sz="1200" dirty="0">
                 <a:solidFill>
                   <a:srgbClr val="444444"/>
                 </a:solidFill>
@@ -15127,7 +15497,7 @@
               <a:t>•  Prompt Engineering </a:t>
             </a:r>
             <a:r>
-              <a:rPr sz="1200" err="1">
+              <a:rPr sz="1200" dirty="0" err="1">
                 <a:solidFill>
                   <a:srgbClr val="444444"/>
                 </a:solidFill>
@@ -15135,7 +15505,7 @@
               <a:t>ist</a:t>
             </a:r>
             <a:r>
-              <a:rPr sz="1200">
+              <a:rPr sz="1200" dirty="0">
                 <a:solidFill>
                   <a:srgbClr val="444444"/>
                 </a:solidFill>
@@ -15143,7 +15513,7 @@
               <a:t> </a:t>
             </a:r>
             <a:r>
-              <a:rPr sz="1200" err="1">
+              <a:rPr sz="1200" dirty="0" err="1">
                 <a:solidFill>
                   <a:srgbClr val="444444"/>
                 </a:solidFill>
@@ -15151,7 +15521,7 @@
               <a:t>entscheidend</a:t>
             </a:r>
             <a:r>
-              <a:rPr sz="1200">
+              <a:rPr sz="1200" dirty="0">
                 <a:solidFill>
                   <a:srgbClr val="444444"/>
                 </a:solidFill>
@@ -15159,14 +15529,14 @@
               <a:t> für </a:t>
             </a:r>
             <a:r>
-              <a:rPr sz="1200" err="1">
+              <a:rPr sz="1200" dirty="0" err="1">
                 <a:solidFill>
                   <a:srgbClr val="444444"/>
                 </a:solidFill>
               </a:rPr>
               <a:t>Qualität</a:t>
             </a:r>
-            <a:endParaRPr sz="1200">
+            <a:endParaRPr sz="1200" dirty="0">
               <a:solidFill>
                 <a:srgbClr val="444444"/>
               </a:solidFill>
@@ -15800,14 +16170,14 @@
           <a:p>
             <a:pPr algn="l"/>
             <a:r>
-              <a:rPr lang="de-AT" sz="1600" b="0" i="0">
-                <a:solidFill>
-                  <a:srgbClr val="444444"/>
-                </a:solidFill>
-              </a:rPr>
-              <a:t>Projektziel &amp; Motivation&amp; Orchestrierung von KI-Modellen</a:t>
-            </a:r>
-            <a:endParaRPr sz="1600" b="0" i="0">
+              <a:rPr lang="de-AT" sz="1600" b="0" i="0" dirty="0">
+                <a:solidFill>
+                  <a:srgbClr val="444444"/>
+                </a:solidFill>
+              </a:rPr>
+              <a:t>Prompt Engineering &amp; Orchestrierung von KI-Modellen</a:t>
+            </a:r>
+            <a:endParaRPr sz="1600" b="0" i="0" dirty="0">
               <a:solidFill>
                 <a:srgbClr val="444444"/>
               </a:solidFill>
@@ -16460,14 +16830,14 @@
       </p:sp>
       <p:sp>
         <p:nvSpPr>
-          <p:cNvPr id="26" name="TextBox 25"/>
+          <p:cNvPr id="29" name="TextBox 28"/>
           <p:cNvSpPr txBox="1"/>
           <p:nvPr/>
         </p:nvSpPr>
         <p:spPr>
           <a:xfrm>
-            <a:off x="1143000" y="5458968"/>
-            <a:ext cx="10058400" cy="365760"/>
+            <a:off x="1143000" y="5431310"/>
+            <a:ext cx="10058400" cy="338554"/>
           </a:xfrm>
           <a:prstGeom prst="rect">
             <a:avLst/>
@@ -16482,119 +16852,7 @@
           <a:p>
             <a:pPr algn="l"/>
             <a:r>
-              <a:rPr sz="1600" b="0" i="0">
-                <a:solidFill>
-                  <a:srgbClr val="444444"/>
-                </a:solidFill>
-              </a:rPr>
-              <a:t>Projektverlauf &amp; Iterationen</a:t>
-            </a:r>
-          </a:p>
-        </p:txBody>
-      </p:sp>
-      <p:sp>
-        <p:nvSpPr>
-          <p:cNvPr id="27" name="Rectangle 26"/>
-          <p:cNvSpPr/>
-          <p:nvPr/>
-        </p:nvSpPr>
-        <p:spPr>
-          <a:xfrm>
-            <a:off x="457200" y="6062472"/>
-            <a:ext cx="502920" cy="438912"/>
-          </a:xfrm>
-          <a:prstGeom prst="rect">
-            <a:avLst/>
-          </a:prstGeom>
-          <a:solidFill>
-            <a:srgbClr val="1A73C8"/>
-          </a:solidFill>
-          <a:ln>
-            <a:noFill/>
-          </a:ln>
-        </p:spPr>
-        <p:style>
-          <a:lnRef idx="1">
-            <a:schemeClr val="accent1"/>
-          </a:lnRef>
-          <a:fillRef idx="3">
-            <a:schemeClr val="accent1"/>
-          </a:fillRef>
-          <a:effectRef idx="2">
-            <a:schemeClr val="accent1"/>
-          </a:effectRef>
-          <a:fontRef idx="minor">
-            <a:schemeClr val="lt1"/>
-          </a:fontRef>
-        </p:style>
-        <p:txBody>
-          <a:bodyPr rtlCol="0" anchor="ctr"/>
-          <a:lstStyle/>
-          <a:p>
-            <a:pPr algn="ctr"/>
-            <a:endParaRPr/>
-          </a:p>
-        </p:txBody>
-      </p:sp>
-      <p:sp>
-        <p:nvSpPr>
-          <p:cNvPr id="28" name="TextBox 27"/>
-          <p:cNvSpPr txBox="1"/>
-          <p:nvPr/>
-        </p:nvSpPr>
-        <p:spPr>
-          <a:xfrm>
-            <a:off x="457200" y="6126480"/>
-            <a:ext cx="502920" cy="320040"/>
-          </a:xfrm>
-          <a:prstGeom prst="rect">
-            <a:avLst/>
-          </a:prstGeom>
-          <a:noFill/>
-        </p:spPr>
-        <p:txBody>
-          <a:bodyPr wrap="square">
-            <a:spAutoFit/>
-          </a:bodyPr>
-          <a:lstStyle/>
-          <a:p>
-            <a:pPr algn="ctr"/>
-            <a:r>
-              <a:rPr sz="1400" b="1" i="0">
-                <a:solidFill>
-                  <a:srgbClr val="FFFFFF"/>
-                </a:solidFill>
-              </a:rPr>
-              <a:t>08</a:t>
-            </a:r>
-          </a:p>
-        </p:txBody>
-      </p:sp>
-      <p:sp>
-        <p:nvSpPr>
-          <p:cNvPr id="29" name="TextBox 28"/>
-          <p:cNvSpPr txBox="1"/>
-          <p:nvPr/>
-        </p:nvSpPr>
-        <p:spPr>
-          <a:xfrm>
-            <a:off x="1143000" y="6135624"/>
-            <a:ext cx="10058400" cy="338554"/>
-          </a:xfrm>
-          <a:prstGeom prst="rect">
-            <a:avLst/>
-          </a:prstGeom>
-          <a:noFill/>
-        </p:spPr>
-        <p:txBody>
-          <a:bodyPr wrap="square">
-            <a:spAutoFit/>
-          </a:bodyPr>
-          <a:lstStyle/>
-          <a:p>
-            <a:pPr algn="l"/>
-            <a:r>
-              <a:rPr lang="de-AT" sz="1600">
+              <a:rPr lang="de-AT" sz="1600" dirty="0">
                 <a:solidFill>
                   <a:srgbClr val="444444"/>
                 </a:solidFill>
@@ -16602,7 +16860,7 @@
               <a:t>Fazit &amp; </a:t>
             </a:r>
             <a:r>
-              <a:rPr lang="de-AT" sz="1600" err="1">
+              <a:rPr lang="de-AT" sz="1600" dirty="0" err="1">
                 <a:solidFill>
                   <a:srgbClr val="444444"/>
                 </a:solidFill>
@@ -16610,14 +16868,14 @@
               <a:t>Lessons</a:t>
             </a:r>
             <a:r>
-              <a:rPr lang="de-AT" sz="1600">
+              <a:rPr lang="de-AT" sz="1600" dirty="0">
                 <a:solidFill>
                   <a:srgbClr val="444444"/>
                 </a:solidFill>
               </a:rPr>
               <a:t> Learned</a:t>
             </a:r>
-            <a:endParaRPr sz="1600" b="0" i="0">
+            <a:endParaRPr sz="1600" b="0" i="0" dirty="0">
               <a:solidFill>
                 <a:srgbClr val="444444"/>
               </a:solidFill>
@@ -19439,7 +19697,7 @@
         <p:spPr>
           <a:xfrm>
             <a:off x="502920" y="1783080"/>
-            <a:ext cx="5029200" cy="1005840"/>
+            <a:ext cx="5029200" cy="692497"/>
           </a:xfrm>
           <a:prstGeom prst="rect">
             <a:avLst/>
@@ -19454,13 +19712,129 @@
           <a:p>
             <a:pPr algn="l"/>
             <a:r>
-              <a:rPr sz="1300" b="0" i="0">
-                <a:solidFill>
-                  <a:srgbClr val="444444"/>
-                </a:solidFill>
-              </a:rPr>
-              <a:t>Untersuchen, wie ein Multi-Agenten-KI-System mit rollenspezifischer Aufgabenverteilung aufgebaut wird und ob es im Software Engineering besser abschneidet als ein einzelner Agent.</a:t>
-            </a:r>
+              <a:rPr sz="1300" b="0" i="0" dirty="0">
+                <a:solidFill>
+                  <a:srgbClr val="444444"/>
+                </a:solidFill>
+              </a:rPr>
+              <a:t>Multi-Agent-KI-System </a:t>
+            </a:r>
+            <a:r>
+              <a:rPr sz="1300" b="0" i="0" dirty="0" err="1">
+                <a:solidFill>
+                  <a:srgbClr val="444444"/>
+                </a:solidFill>
+              </a:rPr>
+              <a:t>mit</a:t>
+            </a:r>
+            <a:r>
+              <a:rPr sz="1300" b="0" i="0" dirty="0">
+                <a:solidFill>
+                  <a:srgbClr val="444444"/>
+                </a:solidFill>
+              </a:rPr>
+              <a:t> </a:t>
+            </a:r>
+            <a:r>
+              <a:rPr sz="1300" b="0" i="0" dirty="0" err="1">
+                <a:solidFill>
+                  <a:srgbClr val="444444"/>
+                </a:solidFill>
+              </a:rPr>
+              <a:t>rollenspezifischer</a:t>
+            </a:r>
+            <a:r>
+              <a:rPr sz="1300" b="0" i="0" dirty="0">
+                <a:solidFill>
+                  <a:srgbClr val="444444"/>
+                </a:solidFill>
+              </a:rPr>
+              <a:t> </a:t>
+            </a:r>
+            <a:r>
+              <a:rPr sz="1300" b="0" i="0" dirty="0" err="1">
+                <a:solidFill>
+                  <a:srgbClr val="444444"/>
+                </a:solidFill>
+              </a:rPr>
+              <a:t>Aufgabenverteilung</a:t>
+            </a:r>
+            <a:r>
+              <a:rPr lang="de-AT" sz="1300" b="0" i="0" dirty="0">
+                <a:solidFill>
+                  <a:srgbClr val="444444"/>
+                </a:solidFill>
+              </a:rPr>
+              <a:t> aufsetzen und untersuchen</a:t>
+            </a:r>
+            <a:r>
+              <a:rPr sz="1300" b="0" i="0" dirty="0">
+                <a:solidFill>
+                  <a:srgbClr val="444444"/>
+                </a:solidFill>
+              </a:rPr>
+              <a:t> </a:t>
+            </a:r>
+            <a:br>
+              <a:rPr lang="de-AT" sz="1300" b="0" i="0" dirty="0">
+                <a:solidFill>
+                  <a:srgbClr val="444444"/>
+                </a:solidFill>
+              </a:rPr>
+            </a:br>
+            <a:r>
+              <a:rPr lang="de-AT" sz="1300" b="0" i="0" dirty="0">
+                <a:solidFill>
+                  <a:srgbClr val="444444"/>
+                </a:solidFill>
+              </a:rPr>
+              <a:t>Schneidet </a:t>
+            </a:r>
+            <a:r>
+              <a:rPr lang="de-AT" sz="1300" b="0" i="0" dirty="0" err="1">
+                <a:solidFill>
+                  <a:srgbClr val="444444"/>
+                </a:solidFill>
+              </a:rPr>
+              <a:t>Multi_Agent</a:t>
+            </a:r>
+            <a:r>
+              <a:rPr lang="de-AT" sz="1300" b="0" i="0" dirty="0">
+                <a:solidFill>
+                  <a:srgbClr val="444444"/>
+                </a:solidFill>
+              </a:rPr>
+              <a:t> </a:t>
+            </a:r>
+            <a:r>
+              <a:rPr sz="1300" b="0" i="0" dirty="0" err="1">
+                <a:solidFill>
+                  <a:srgbClr val="444444"/>
+                </a:solidFill>
+              </a:rPr>
+              <a:t>besser</a:t>
+            </a:r>
+            <a:r>
+              <a:rPr sz="1300" b="0" i="0" dirty="0">
+                <a:solidFill>
+                  <a:srgbClr val="444444"/>
+                </a:solidFill>
+              </a:rPr>
+              <a:t> </a:t>
+            </a:r>
+            <a:r>
+              <a:rPr lang="de-AT" sz="1300" b="0" i="0" dirty="0">
+                <a:solidFill>
+                  <a:srgbClr val="444444"/>
+                </a:solidFill>
+              </a:rPr>
+              <a:t>ab als Single Agent beim Coding?</a:t>
+            </a:r>
+            <a:endParaRPr sz="1300" b="0" i="0" dirty="0">
+              <a:solidFill>
+                <a:srgbClr val="444444"/>
+              </a:solidFill>
+            </a:endParaRPr>
           </a:p>
         </p:txBody>
       </p:sp>
@@ -20289,7 +20663,7 @@
         <p:spPr>
           <a:xfrm>
             <a:off x="502920" y="1828800"/>
-            <a:ext cx="3383280" cy="4572000"/>
+            <a:ext cx="3383280" cy="1092607"/>
           </a:xfrm>
           <a:prstGeom prst="rect">
             <a:avLst/>
@@ -20308,13 +20682,58 @@
               </a:spcBef>
             </a:pPr>
             <a:r>
-              <a:rPr sz="1100">
-                <a:solidFill>
-                  <a:srgbClr val="444444"/>
-                </a:solidFill>
-              </a:rPr>
-              <a:t>•  Einfache LangChain-Chain: PO → Architect → Developer</a:t>
-            </a:r>
+              <a:rPr sz="1100" dirty="0">
+                <a:solidFill>
+                  <a:srgbClr val="444444"/>
+                </a:solidFill>
+              </a:rPr>
+              <a:t>•  </a:t>
+            </a:r>
+            <a:r>
+              <a:rPr sz="1100" dirty="0" err="1">
+                <a:solidFill>
+                  <a:srgbClr val="444444"/>
+                </a:solidFill>
+              </a:rPr>
+              <a:t>Einfache</a:t>
+            </a:r>
+            <a:r>
+              <a:rPr sz="1100" dirty="0">
+                <a:solidFill>
+                  <a:srgbClr val="444444"/>
+                </a:solidFill>
+              </a:rPr>
+              <a:t> </a:t>
+            </a:r>
+            <a:r>
+              <a:rPr sz="1100" dirty="0" err="1">
+                <a:solidFill>
+                  <a:srgbClr val="444444"/>
+                </a:solidFill>
+              </a:rPr>
+              <a:t>LangChain</a:t>
+            </a:r>
+            <a:r>
+              <a:rPr sz="1100" dirty="0">
+                <a:solidFill>
+                  <a:srgbClr val="444444"/>
+                </a:solidFill>
+              </a:rPr>
+              <a:t>-Chain: PO → Architect → Developer</a:t>
+            </a:r>
+            <a:r>
+              <a:rPr lang="de-AT" sz="1100" dirty="0">
+                <a:solidFill>
+                  <a:srgbClr val="444444"/>
+                </a:solidFill>
+              </a:rPr>
+              <a:t> → Tester</a:t>
+            </a:r>
+            <a:endParaRPr sz="1100" dirty="0">
+              <a:solidFill>
+                <a:srgbClr val="444444"/>
+              </a:solidFill>
+            </a:endParaRPr>
           </a:p>
           <a:p>
             <a:pPr>
@@ -20323,12 +20742,28 @@
               </a:spcBef>
             </a:pPr>
             <a:r>
-              <a:rPr sz="1100">
-                <a:solidFill>
-                  <a:srgbClr val="444444"/>
-                </a:solidFill>
-              </a:rPr>
-              <a:t>•  Keine Iterationen, kein Feedback-Loop</a:t>
+              <a:rPr sz="1100" dirty="0">
+                <a:solidFill>
+                  <a:srgbClr val="444444"/>
+                </a:solidFill>
+              </a:rPr>
+              <a:t>•  Keine Iterationen, </a:t>
+            </a:r>
+            <a:r>
+              <a:rPr sz="1100" dirty="0" err="1">
+                <a:solidFill>
+                  <a:srgbClr val="444444"/>
+                </a:solidFill>
+              </a:rPr>
+              <a:t>kein</a:t>
+            </a:r>
+            <a:r>
+              <a:rPr sz="1100" dirty="0">
+                <a:solidFill>
+                  <a:srgbClr val="444444"/>
+                </a:solidFill>
+              </a:rPr>
+              <a:t> Feedback-Loop</a:t>
             </a:r>
           </a:p>
           <a:p>
@@ -20338,12 +20773,44 @@
               </a:spcBef>
             </a:pPr>
             <a:r>
-              <a:rPr sz="1100">
-                <a:solidFill>
-                  <a:srgbClr val="444444"/>
-                </a:solidFill>
-              </a:rPr>
-              <a:t>•  Problem: Generierter Code kompilierte nicht</a:t>
+              <a:rPr sz="1100" dirty="0">
+                <a:solidFill>
+                  <a:srgbClr val="444444"/>
+                </a:solidFill>
+              </a:rPr>
+              <a:t>•  Problem: </a:t>
+            </a:r>
+            <a:r>
+              <a:rPr sz="1100" dirty="0" err="1">
+                <a:solidFill>
+                  <a:srgbClr val="444444"/>
+                </a:solidFill>
+              </a:rPr>
+              <a:t>Generierter</a:t>
+            </a:r>
+            <a:r>
+              <a:rPr sz="1100" dirty="0">
+                <a:solidFill>
+                  <a:srgbClr val="444444"/>
+                </a:solidFill>
+              </a:rPr>
+              <a:t> Code </a:t>
+            </a:r>
+            <a:r>
+              <a:rPr sz="1100" dirty="0" err="1">
+                <a:solidFill>
+                  <a:srgbClr val="444444"/>
+                </a:solidFill>
+              </a:rPr>
+              <a:t>kompilierte</a:t>
+            </a:r>
+            <a:r>
+              <a:rPr sz="1100" dirty="0">
+                <a:solidFill>
+                  <a:srgbClr val="444444"/>
+                </a:solidFill>
+              </a:rPr>
+              <a:t> nicht</a:t>
             </a:r>
           </a:p>
           <a:p>
@@ -20353,13 +20820,58 @@
               </a:spcBef>
             </a:pPr>
             <a:r>
-              <a:rPr sz="1100">
-                <a:solidFill>
-                  <a:srgbClr val="444444"/>
-                </a:solidFill>
-              </a:rPr>
-              <a:t>•  Kein Reviewer → Fehler wurden nie erkannt</a:t>
-            </a:r>
+              <a:rPr sz="1100" dirty="0">
+                <a:solidFill>
+                  <a:srgbClr val="444444"/>
+                </a:solidFill>
+              </a:rPr>
+              <a:t>•  Kein Reviewer → Fehler </a:t>
+            </a:r>
+            <a:r>
+              <a:rPr sz="1100" dirty="0" err="1">
+                <a:solidFill>
+                  <a:srgbClr val="444444"/>
+                </a:solidFill>
+              </a:rPr>
+              <a:t>wurden</a:t>
+            </a:r>
+            <a:r>
+              <a:rPr sz="1100" dirty="0">
+                <a:solidFill>
+                  <a:srgbClr val="444444"/>
+                </a:solidFill>
+              </a:rPr>
+              <a:t> </a:t>
+            </a:r>
+            <a:r>
+              <a:rPr sz="1100" dirty="0" err="1">
+                <a:solidFill>
+                  <a:srgbClr val="444444"/>
+                </a:solidFill>
+              </a:rPr>
+              <a:t>nie</a:t>
+            </a:r>
+            <a:r>
+              <a:rPr sz="1100" dirty="0">
+                <a:solidFill>
+                  <a:srgbClr val="444444"/>
+                </a:solidFill>
+              </a:rPr>
+              <a:t> </a:t>
+            </a:r>
+            <a:r>
+              <a:rPr sz="1100" dirty="0" err="1">
+                <a:solidFill>
+                  <a:srgbClr val="444444"/>
+                </a:solidFill>
+              </a:rPr>
+              <a:t>erkannt</a:t>
+            </a:r>
+            <a:endParaRPr sz="1100" dirty="0">
+              <a:solidFill>
+                <a:srgbClr val="444444"/>
+              </a:solidFill>
+            </a:endParaRPr>
           </a:p>
         </p:txBody>
       </p:sp>
@@ -20583,13 +21095,58 @@
               </a:spcBef>
             </a:pPr>
             <a:r>
-              <a:rPr sz="1100">
-                <a:solidFill>
-                  <a:srgbClr val="444444"/>
-                </a:solidFill>
-              </a:rPr>
-              <a:t>•  Zyklischer Graph mit Reviewer-Loop eingebaut</a:t>
-            </a:r>
+              <a:rPr sz="1100" dirty="0">
+                <a:solidFill>
+                  <a:srgbClr val="444444"/>
+                </a:solidFill>
+              </a:rPr>
+              <a:t>•  </a:t>
+            </a:r>
+            <a:r>
+              <a:rPr sz="1100" dirty="0" err="1">
+                <a:solidFill>
+                  <a:srgbClr val="444444"/>
+                </a:solidFill>
+              </a:rPr>
+              <a:t>Zyklischer</a:t>
+            </a:r>
+            <a:r>
+              <a:rPr sz="1100" dirty="0">
+                <a:solidFill>
+                  <a:srgbClr val="444444"/>
+                </a:solidFill>
+              </a:rPr>
+              <a:t> Graph </a:t>
+            </a:r>
+            <a:r>
+              <a:rPr sz="1100" dirty="0" err="1">
+                <a:solidFill>
+                  <a:srgbClr val="444444"/>
+                </a:solidFill>
+              </a:rPr>
+              <a:t>mit</a:t>
+            </a:r>
+            <a:r>
+              <a:rPr sz="1100" dirty="0">
+                <a:solidFill>
+                  <a:srgbClr val="444444"/>
+                </a:solidFill>
+              </a:rPr>
+              <a:t> Reviewer-Loop </a:t>
+            </a:r>
+            <a:r>
+              <a:rPr sz="1100" dirty="0" err="1">
+                <a:solidFill>
+                  <a:srgbClr val="444444"/>
+                </a:solidFill>
+              </a:rPr>
+              <a:t>eingebaut</a:t>
+            </a:r>
+            <a:endParaRPr sz="1100" dirty="0">
+              <a:solidFill>
+                <a:srgbClr val="444444"/>
+              </a:solidFill>
+            </a:endParaRPr>
           </a:p>
           <a:p>
             <a:pPr>
@@ -20598,13 +21155,90 @@
               </a:spcBef>
             </a:pPr>
             <a:r>
-              <a:rPr sz="1100">
-                <a:solidFill>
-                  <a:srgbClr val="444444"/>
-                </a:solidFill>
-              </a:rPr>
-              <a:t>•  Problem: Agenten konnten keine Befehle ausführen</a:t>
-            </a:r>
+              <a:rPr sz="1100" dirty="0">
+                <a:solidFill>
+                  <a:srgbClr val="444444"/>
+                </a:solidFill>
+              </a:rPr>
+              <a:t>•  Problem: </a:t>
+            </a:r>
+            <a:r>
+              <a:rPr sz="1100" dirty="0" err="1">
+                <a:solidFill>
+                  <a:srgbClr val="444444"/>
+                </a:solidFill>
+              </a:rPr>
+              <a:t>Agenten</a:t>
+            </a:r>
+            <a:r>
+              <a:rPr sz="1100" dirty="0">
+                <a:solidFill>
+                  <a:srgbClr val="444444"/>
+                </a:solidFill>
+              </a:rPr>
+              <a:t> </a:t>
+            </a:r>
+            <a:r>
+              <a:rPr sz="1100" dirty="0" err="1">
+                <a:solidFill>
+                  <a:srgbClr val="444444"/>
+                </a:solidFill>
+              </a:rPr>
+              <a:t>konnten</a:t>
+            </a:r>
+            <a:r>
+              <a:rPr sz="1100" dirty="0">
+                <a:solidFill>
+                  <a:srgbClr val="444444"/>
+                </a:solidFill>
+              </a:rPr>
+              <a:t> </a:t>
+            </a:r>
+            <a:r>
+              <a:rPr sz="1100" dirty="0" err="1">
+                <a:solidFill>
+                  <a:srgbClr val="444444"/>
+                </a:solidFill>
+              </a:rPr>
+              <a:t>keine</a:t>
+            </a:r>
+            <a:r>
+              <a:rPr sz="1100" dirty="0">
+                <a:solidFill>
+                  <a:srgbClr val="444444"/>
+                </a:solidFill>
+              </a:rPr>
+              <a:t> </a:t>
+            </a:r>
+            <a:r>
+              <a:rPr sz="1100" dirty="0" err="1">
+                <a:solidFill>
+                  <a:srgbClr val="444444"/>
+                </a:solidFill>
+              </a:rPr>
+              <a:t>Befehle</a:t>
+            </a:r>
+            <a:r>
+              <a:rPr sz="1100" dirty="0">
+                <a:solidFill>
+                  <a:srgbClr val="444444"/>
+                </a:solidFill>
+              </a:rPr>
+              <a:t> </a:t>
+            </a:r>
+            <a:r>
+              <a:rPr sz="1100" dirty="0" err="1">
+                <a:solidFill>
+                  <a:srgbClr val="444444"/>
+                </a:solidFill>
+              </a:rPr>
+              <a:t>ausführen</a:t>
+            </a:r>
+            <a:endParaRPr sz="1100" dirty="0">
+              <a:solidFill>
+                <a:srgbClr val="444444"/>
+              </a:solidFill>
+            </a:endParaRPr>
           </a:p>
           <a:p>
             <a:pPr>
@@ -20613,13 +21247,74 @@
               </a:spcBef>
             </a:pPr>
             <a:r>
-              <a:rPr sz="1100">
-                <a:solidFill>
-                  <a:srgbClr val="444444"/>
-                </a:solidFill>
-              </a:rPr>
-              <a:t>•  LLM-Agenten verstanden 'Implementiere Code' nicht wörtlich</a:t>
-            </a:r>
+              <a:rPr sz="1100" dirty="0">
+                <a:solidFill>
+                  <a:srgbClr val="444444"/>
+                </a:solidFill>
+              </a:rPr>
+              <a:t>•  LLM-</a:t>
+            </a:r>
+            <a:r>
+              <a:rPr sz="1100" dirty="0" err="1">
+                <a:solidFill>
+                  <a:srgbClr val="444444"/>
+                </a:solidFill>
+              </a:rPr>
+              <a:t>Agenten</a:t>
+            </a:r>
+            <a:r>
+              <a:rPr sz="1100" dirty="0">
+                <a:solidFill>
+                  <a:srgbClr val="444444"/>
+                </a:solidFill>
+              </a:rPr>
+              <a:t> </a:t>
+            </a:r>
+            <a:r>
+              <a:rPr sz="1100" dirty="0" err="1">
+                <a:solidFill>
+                  <a:srgbClr val="444444"/>
+                </a:solidFill>
+              </a:rPr>
+              <a:t>verstanden</a:t>
+            </a:r>
+            <a:r>
+              <a:rPr sz="1100" dirty="0">
+                <a:solidFill>
+                  <a:srgbClr val="444444"/>
+                </a:solidFill>
+              </a:rPr>
+              <a:t> '</a:t>
+            </a:r>
+            <a:r>
+              <a:rPr sz="1100" dirty="0" err="1">
+                <a:solidFill>
+                  <a:srgbClr val="444444"/>
+                </a:solidFill>
+              </a:rPr>
+              <a:t>Implementiere</a:t>
+            </a:r>
+            <a:r>
+              <a:rPr sz="1100" dirty="0">
+                <a:solidFill>
+                  <a:srgbClr val="444444"/>
+                </a:solidFill>
+              </a:rPr>
+              <a:t> Code' nicht </a:t>
+            </a:r>
+            <a:r>
+              <a:rPr sz="1100" dirty="0" err="1">
+                <a:solidFill>
+                  <a:srgbClr val="444444"/>
+                </a:solidFill>
+              </a:rPr>
+              <a:t>wörtlich</a:t>
+            </a:r>
+            <a:endParaRPr sz="1100" dirty="0">
+              <a:solidFill>
+                <a:srgbClr val="444444"/>
+              </a:solidFill>
+            </a:endParaRPr>
           </a:p>
           <a:p>
             <a:pPr>
@@ -20628,13 +21323,106 @@
               </a:spcBef>
             </a:pPr>
             <a:r>
-              <a:rPr sz="1100">
-                <a:solidFill>
-                  <a:srgbClr val="444444"/>
-                </a:solidFill>
-              </a:rPr>
-              <a:t>•  Jeder Shell-Befehl musste einzeln beigebracht werden</a:t>
-            </a:r>
+              <a:rPr sz="1100" dirty="0">
+                <a:solidFill>
+                  <a:srgbClr val="444444"/>
+                </a:solidFill>
+              </a:rPr>
+              <a:t>•  </a:t>
+            </a:r>
+            <a:r>
+              <a:rPr sz="1100" dirty="0" err="1">
+                <a:solidFill>
+                  <a:srgbClr val="444444"/>
+                </a:solidFill>
+              </a:rPr>
+              <a:t>Jeder</a:t>
+            </a:r>
+            <a:r>
+              <a:rPr sz="1100" dirty="0">
+                <a:solidFill>
+                  <a:srgbClr val="444444"/>
+                </a:solidFill>
+              </a:rPr>
+              <a:t> Shell-</a:t>
+            </a:r>
+            <a:r>
+              <a:rPr sz="1100" dirty="0" err="1">
+                <a:solidFill>
+                  <a:srgbClr val="444444"/>
+                </a:solidFill>
+              </a:rPr>
+              <a:t>Befehl</a:t>
+            </a:r>
+            <a:r>
+              <a:rPr sz="1100" dirty="0">
+                <a:solidFill>
+                  <a:srgbClr val="444444"/>
+                </a:solidFill>
+              </a:rPr>
+              <a:t> </a:t>
+            </a:r>
+            <a:r>
+              <a:rPr sz="1100" dirty="0" err="1">
+                <a:solidFill>
+                  <a:srgbClr val="444444"/>
+                </a:solidFill>
+              </a:rPr>
+              <a:t>musste</a:t>
+            </a:r>
+            <a:r>
+              <a:rPr sz="1100" dirty="0">
+                <a:solidFill>
+                  <a:srgbClr val="444444"/>
+                </a:solidFill>
+              </a:rPr>
+              <a:t> </a:t>
+            </a:r>
+            <a:r>
+              <a:rPr sz="1100" dirty="0" err="1">
+                <a:solidFill>
+                  <a:srgbClr val="444444"/>
+                </a:solidFill>
+              </a:rPr>
+              <a:t>einzeln</a:t>
+            </a:r>
+            <a:r>
+              <a:rPr sz="1100" dirty="0">
+                <a:solidFill>
+                  <a:srgbClr val="444444"/>
+                </a:solidFill>
+              </a:rPr>
+              <a:t> </a:t>
+            </a:r>
+            <a:r>
+              <a:rPr sz="1100" dirty="0" err="1">
+                <a:solidFill>
+                  <a:srgbClr val="444444"/>
+                </a:solidFill>
+              </a:rPr>
+              <a:t>beigebracht</a:t>
+            </a:r>
+            <a:r>
+              <a:rPr sz="1100" dirty="0">
+                <a:solidFill>
+                  <a:srgbClr val="444444"/>
+                </a:solidFill>
+              </a:rPr>
+              <a:t> </a:t>
+            </a:r>
+            <a:r>
+              <a:rPr sz="1100" dirty="0" err="1">
+                <a:solidFill>
+                  <a:srgbClr val="444444"/>
+                </a:solidFill>
+              </a:rPr>
+              <a:t>werden</a:t>
+            </a:r>
+            <a:endParaRPr sz="1100" dirty="0">
+              <a:solidFill>
+                <a:srgbClr val="444444"/>
+              </a:solidFill>
+            </a:endParaRPr>
           </a:p>
           <a:p>
             <a:pPr>
@@ -20643,13 +21431,74 @@
               </a:spcBef>
             </a:pPr>
             <a:r>
-              <a:rPr sz="1100">
-                <a:solidFill>
-                  <a:srgbClr val="444444"/>
-                </a:solidFill>
-              </a:rPr>
-              <a:t>•  Agenten 'halluzinierten' Dateipfade und Strukturen</a:t>
-            </a:r>
+              <a:rPr sz="1100" dirty="0">
+                <a:solidFill>
+                  <a:srgbClr val="444444"/>
+                </a:solidFill>
+              </a:rPr>
+              <a:t>•  </a:t>
+            </a:r>
+            <a:r>
+              <a:rPr sz="1100" dirty="0" err="1">
+                <a:solidFill>
+                  <a:srgbClr val="444444"/>
+                </a:solidFill>
+              </a:rPr>
+              <a:t>Agenten</a:t>
+            </a:r>
+            <a:r>
+              <a:rPr sz="1100" dirty="0">
+                <a:solidFill>
+                  <a:srgbClr val="444444"/>
+                </a:solidFill>
+              </a:rPr>
+              <a:t> '</a:t>
+            </a:r>
+            <a:r>
+              <a:rPr sz="1100" dirty="0" err="1">
+                <a:solidFill>
+                  <a:srgbClr val="444444"/>
+                </a:solidFill>
+              </a:rPr>
+              <a:t>halluzinierten</a:t>
+            </a:r>
+            <a:r>
+              <a:rPr sz="1100" dirty="0">
+                <a:solidFill>
+                  <a:srgbClr val="444444"/>
+                </a:solidFill>
+              </a:rPr>
+              <a:t>' </a:t>
+            </a:r>
+            <a:r>
+              <a:rPr sz="1100" dirty="0" err="1">
+                <a:solidFill>
+                  <a:srgbClr val="444444"/>
+                </a:solidFill>
+              </a:rPr>
+              <a:t>Dateipfade</a:t>
+            </a:r>
+            <a:r>
+              <a:rPr sz="1100" dirty="0">
+                <a:solidFill>
+                  <a:srgbClr val="444444"/>
+                </a:solidFill>
+              </a:rPr>
+              <a:t> und </a:t>
+            </a:r>
+            <a:r>
+              <a:rPr sz="1100" dirty="0" err="1">
+                <a:solidFill>
+                  <a:srgbClr val="444444"/>
+                </a:solidFill>
+              </a:rPr>
+              <a:t>Strukturen</a:t>
+            </a:r>
+            <a:endParaRPr sz="1100" dirty="0">
+              <a:solidFill>
+                <a:srgbClr val="444444"/>
+              </a:solidFill>
+            </a:endParaRPr>
           </a:p>
         </p:txBody>
       </p:sp>
@@ -21055,7 +21904,7 @@
           <a:p>
             <a:pPr algn="l"/>
             <a:r>
-              <a:rPr sz="1300" b="0" i="1">
+              <a:rPr sz="1300" b="0" i="1" dirty="0">
                 <a:solidFill>
                   <a:srgbClr val="BBD7F0"/>
                 </a:solidFill>
@@ -21063,7 +21912,7 @@
               <a:t>Gleicher Stack für </a:t>
             </a:r>
             <a:r>
-              <a:rPr lang="de-AT" sz="1300" b="0" i="1" err="1">
+              <a:rPr lang="de-AT" sz="1300" b="0" i="1" dirty="0">
                 <a:solidFill>
                   <a:srgbClr val="BBD7F0"/>
                 </a:solidFill>
@@ -21071,7 +21920,7 @@
               <a:t>beide</a:t>
             </a:r>
             <a:r>
-              <a:rPr sz="1300" b="0" i="1">
+              <a:rPr sz="1300" b="0" i="1" dirty="0">
                 <a:solidFill>
                   <a:srgbClr val="BBD7F0"/>
                 </a:solidFill>
@@ -21079,7 +21928,7 @@
               <a:t> Systeme – </a:t>
             </a:r>
             <a:r>
-              <a:rPr lang="de-AT" sz="1300" b="0" i="1" err="1">
+              <a:rPr lang="de-AT" sz="1300" b="0" i="1" dirty="0">
                 <a:solidFill>
                   <a:srgbClr val="BBD7F0"/>
                 </a:solidFill>
@@ -21087,7 +21936,7 @@
               <a:t>Vergleichbarkeit</a:t>
             </a:r>
             <a:r>
-              <a:rPr sz="1300" b="0" i="1">
+              <a:rPr sz="1300" b="0" i="1" dirty="0">
                 <a:solidFill>
                   <a:srgbClr val="BBD7F0"/>
                 </a:solidFill>
@@ -21095,14 +21944,14 @@
               <a:t> </a:t>
             </a:r>
             <a:r>
-              <a:rPr lang="de-AT" sz="1300" b="0" i="1" err="1">
+              <a:rPr lang="de-AT" sz="1300" b="0" i="1" dirty="0">
                 <a:solidFill>
                   <a:srgbClr val="BBD7F0"/>
                 </a:solidFill>
               </a:rPr>
               <a:t>sichergestellt</a:t>
             </a:r>
-            <a:endParaRPr sz="1300" b="0" i="1">
+            <a:endParaRPr sz="1300" b="0" i="1" dirty="0">
               <a:solidFill>
                 <a:srgbClr val="BBD7F0"/>
               </a:solidFill>
@@ -22680,7 +23529,7 @@
         <p:spPr>
           <a:xfrm>
             <a:off x="548640" y="5376672"/>
-            <a:ext cx="10972800" cy="1005840"/>
+            <a:ext cx="10972800" cy="276999"/>
           </a:xfrm>
           <a:prstGeom prst="rect">
             <a:avLst/>
@@ -22695,7 +23544,7 @@
           <a:p>
             <a:pPr algn="l"/>
             <a:r>
-              <a:rPr sz="1200" b="0" i="0" err="1">
+              <a:rPr sz="1200" b="0" i="0" dirty="0" err="1">
                 <a:solidFill>
                   <a:srgbClr val="444444"/>
                 </a:solidFill>
@@ -22703,7 +23552,7 @@
               <a:t>Klassische</a:t>
             </a:r>
             <a:r>
-              <a:rPr sz="1200" b="0" i="0">
+              <a:rPr sz="1200" b="0" i="0" dirty="0">
                 <a:solidFill>
                   <a:srgbClr val="444444"/>
                 </a:solidFill>
@@ -22711,7 +23560,7 @@
               <a:t> </a:t>
             </a:r>
             <a:r>
-              <a:rPr sz="1200" b="0" i="0" err="1">
+              <a:rPr sz="1200" b="0" i="0" dirty="0" err="1">
                 <a:solidFill>
                   <a:srgbClr val="444444"/>
                 </a:solidFill>
@@ -22719,7 +23568,7 @@
               <a:t>LangChain</a:t>
             </a:r>
             <a:r>
-              <a:rPr sz="1200" b="0" i="0">
+              <a:rPr sz="1200" b="0" i="0" dirty="0">
                 <a:solidFill>
                   <a:srgbClr val="444444"/>
                 </a:solidFill>
@@ -22727,7 +23576,7 @@
               <a:t>-Chains </a:t>
             </a:r>
             <a:r>
-              <a:rPr sz="1200" b="0" i="0" err="1">
+              <a:rPr sz="1200" b="0" i="0" dirty="0" err="1">
                 <a:solidFill>
                   <a:srgbClr val="444444"/>
                 </a:solidFill>
@@ -22735,23 +23584,15 @@
               <a:t>sind</a:t>
             </a:r>
             <a:r>
-              <a:rPr sz="1200" b="0" i="0">
-                <a:solidFill>
-                  <a:srgbClr val="444444"/>
-                </a:solidFill>
-              </a:rPr>
-              <a:t> linear – </a:t>
-            </a:r>
-            <a:r>
-              <a:rPr sz="1200" b="0" i="0" err="1">
-                <a:solidFill>
-                  <a:srgbClr val="444444"/>
-                </a:solidFill>
-              </a:rPr>
-              <a:t>sie</a:t>
-            </a:r>
-            <a:r>
-              <a:rPr sz="1200" b="0" i="0">
+              <a:rPr sz="1200" b="0" i="0" dirty="0">
+                <a:solidFill>
+                  <a:srgbClr val="444444"/>
+                </a:solidFill>
+              </a:rPr>
+              <a:t> linear –</a:t>
+            </a:r>
+            <a:r>
+              <a:rPr lang="de-AT" sz="1200" b="0" i="0" dirty="0">
                 <a:solidFill>
                   <a:srgbClr val="444444"/>
                 </a:solidFill>
@@ -22759,31 +23600,15 @@
               <a:t> </a:t>
             </a:r>
             <a:r>
-              <a:rPr sz="1200" b="0" i="0" err="1">
-                <a:solidFill>
-                  <a:srgbClr val="444444"/>
-                </a:solidFill>
-              </a:rPr>
-              <a:t>können</a:t>
-            </a:r>
-            <a:r>
-              <a:rPr sz="1200" b="0" i="0">
-                <a:solidFill>
-                  <a:srgbClr val="444444"/>
-                </a:solidFill>
-              </a:rPr>
-              <a:t> nicht auf Fehler </a:t>
-            </a:r>
-            <a:r>
-              <a:rPr sz="1200" b="0" i="0" err="1">
-                <a:solidFill>
-                  <a:srgbClr val="444444"/>
-                </a:solidFill>
-              </a:rPr>
-              <a:t>reagieren</a:t>
-            </a:r>
-            <a:r>
-              <a:rPr sz="1200" b="0" i="0">
+              <a:rPr sz="1200" b="0" i="0" dirty="0" err="1">
+                <a:solidFill>
+                  <a:srgbClr val="444444"/>
+                </a:solidFill>
+              </a:rPr>
+              <a:t>LangGraph</a:t>
+            </a:r>
+            <a:r>
+              <a:rPr sz="1200" b="0" i="0" dirty="0">
                 <a:solidFill>
                   <a:srgbClr val="444444"/>
                 </a:solidFill>
@@ -22791,15 +23616,15 @@
               <a:t> </a:t>
             </a:r>
             <a:r>
-              <a:rPr sz="1200" b="0" i="0" err="1">
-                <a:solidFill>
-                  <a:srgbClr val="444444"/>
-                </a:solidFill>
-              </a:rPr>
-              <a:t>oder</a:t>
-            </a:r>
-            <a:r>
-              <a:rPr sz="1200" b="0" i="0">
+              <a:rPr sz="1200" b="0" i="0" dirty="0" err="1">
+                <a:solidFill>
+                  <a:srgbClr val="444444"/>
+                </a:solidFill>
+              </a:rPr>
+              <a:t>erlaubt</a:t>
+            </a:r>
+            <a:r>
+              <a:rPr sz="1200" b="0" i="0" dirty="0">
                 <a:solidFill>
                   <a:srgbClr val="444444"/>
                 </a:solidFill>
@@ -22807,71 +23632,7 @@
               <a:t> </a:t>
             </a:r>
             <a:r>
-              <a:rPr sz="1200" b="0" i="0" err="1">
-                <a:solidFill>
-                  <a:srgbClr val="444444"/>
-                </a:solidFill>
-              </a:rPr>
-              <a:t>Schritte</a:t>
-            </a:r>
-            <a:r>
-              <a:rPr sz="1200" b="0" i="0">
-                <a:solidFill>
-                  <a:srgbClr val="444444"/>
-                </a:solidFill>
-              </a:rPr>
-              <a:t> </a:t>
-            </a:r>
-            <a:r>
-              <a:rPr sz="1200" b="0" i="0" err="1">
-                <a:solidFill>
-                  <a:srgbClr val="444444"/>
-                </a:solidFill>
-              </a:rPr>
-              <a:t>wiederholen</a:t>
-            </a:r>
-            <a:r>
-              <a:rPr sz="1200" b="0" i="0">
-                <a:solidFill>
-                  <a:srgbClr val="444444"/>
-                </a:solidFill>
-              </a:rPr>
-              <a:t>. </a:t>
-            </a:r>
-            <a:r>
-              <a:rPr sz="1200" b="0" i="0" err="1">
-                <a:solidFill>
-                  <a:srgbClr val="444444"/>
-                </a:solidFill>
-              </a:rPr>
-              <a:t>LangGraph</a:t>
-            </a:r>
-            <a:r>
-              <a:rPr sz="1200" b="0" i="0">
-                <a:solidFill>
-                  <a:srgbClr val="444444"/>
-                </a:solidFill>
-              </a:rPr>
-              <a:t> </a:t>
-            </a:r>
-            <a:r>
-              <a:rPr sz="1200" b="0" i="0" err="1">
-                <a:solidFill>
-                  <a:srgbClr val="444444"/>
-                </a:solidFill>
-              </a:rPr>
-              <a:t>erlaubt</a:t>
-            </a:r>
-            <a:r>
-              <a:rPr sz="1200" b="0" i="0">
-                <a:solidFill>
-                  <a:srgbClr val="444444"/>
-                </a:solidFill>
-              </a:rPr>
-              <a:t> </a:t>
-            </a:r>
-            <a:r>
-              <a:rPr sz="1200" b="0" i="0" err="1">
+              <a:rPr sz="1200" b="0" i="0" dirty="0" err="1">
                 <a:solidFill>
                   <a:srgbClr val="444444"/>
                 </a:solidFill>
@@ -22879,7 +23640,7 @@
               <a:t>zyklische</a:t>
             </a:r>
             <a:r>
-              <a:rPr sz="1200" b="0" i="0">
+              <a:rPr sz="1200" b="0" i="0" dirty="0">
                 <a:solidFill>
                   <a:srgbClr val="444444"/>
                 </a:solidFill>
@@ -22887,7 +23648,7 @@
               <a:t>, </a:t>
             </a:r>
             <a:r>
-              <a:rPr sz="1200" b="0" i="0" err="1">
+              <a:rPr sz="1200" b="0" i="0" dirty="0" err="1">
                 <a:solidFill>
                   <a:srgbClr val="444444"/>
                 </a:solidFill>
@@ -22895,140 +23656,12 @@
               <a:t>zustandsbehaftete</a:t>
             </a:r>
             <a:r>
-              <a:rPr sz="1200" b="0" i="0">
-                <a:solidFill>
-                  <a:srgbClr val="444444"/>
-                </a:solidFill>
-              </a:rPr>
-              <a:t> Graphen: Wenn der Reviewer-Agent </a:t>
-            </a:r>
-            <a:r>
-              <a:rPr sz="1200" b="0" i="0" err="1">
-                <a:solidFill>
-                  <a:srgbClr val="444444"/>
-                </a:solidFill>
-              </a:rPr>
-              <a:t>ein</a:t>
-            </a:r>
-            <a:r>
-              <a:rPr sz="1200" b="0" i="0">
-                <a:solidFill>
-                  <a:srgbClr val="444444"/>
-                </a:solidFill>
-              </a:rPr>
-              <a:t> FAIL </a:t>
-            </a:r>
-            <a:r>
-              <a:rPr sz="1200" b="0" i="0" err="1">
-                <a:solidFill>
-                  <a:srgbClr val="444444"/>
-                </a:solidFill>
-              </a:rPr>
-              <a:t>ausgibt</a:t>
-            </a:r>
-            <a:r>
-              <a:rPr sz="1200" b="0" i="0">
-                <a:solidFill>
-                  <a:srgbClr val="444444"/>
-                </a:solidFill>
-              </a:rPr>
-              <a:t>, </a:t>
-            </a:r>
-            <a:r>
-              <a:rPr sz="1200" b="0" i="0" err="1">
-                <a:solidFill>
-                  <a:srgbClr val="444444"/>
-                </a:solidFill>
-              </a:rPr>
-              <a:t>springt</a:t>
-            </a:r>
-            <a:r>
-              <a:rPr sz="1200" b="0" i="0">
-                <a:solidFill>
-                  <a:srgbClr val="444444"/>
-                </a:solidFill>
-              </a:rPr>
-              <a:t> der Graph </a:t>
-            </a:r>
-            <a:r>
-              <a:rPr sz="1200" b="0" i="0" err="1">
-                <a:solidFill>
-                  <a:srgbClr val="444444"/>
-                </a:solidFill>
-              </a:rPr>
-              <a:t>automatisch</a:t>
-            </a:r>
-            <a:r>
-              <a:rPr sz="1200" b="0" i="0">
-                <a:solidFill>
-                  <a:srgbClr val="444444"/>
-                </a:solidFill>
-              </a:rPr>
-              <a:t> </a:t>
-            </a:r>
-            <a:r>
-              <a:rPr sz="1200" b="0" i="0" err="1">
-                <a:solidFill>
-                  <a:srgbClr val="444444"/>
-                </a:solidFill>
-              </a:rPr>
-              <a:t>zurück</a:t>
-            </a:r>
-            <a:r>
-              <a:rPr sz="1200" b="0" i="0">
-                <a:solidFill>
-                  <a:srgbClr val="444444"/>
-                </a:solidFill>
-              </a:rPr>
-              <a:t> </a:t>
-            </a:r>
-            <a:r>
-              <a:rPr sz="1200" b="0" i="0" err="1">
-                <a:solidFill>
-                  <a:srgbClr val="444444"/>
-                </a:solidFill>
-              </a:rPr>
-              <a:t>zum</a:t>
-            </a:r>
-            <a:r>
-              <a:rPr sz="1200" b="0" i="0">
-                <a:solidFill>
-                  <a:srgbClr val="444444"/>
-                </a:solidFill>
-              </a:rPr>
-              <a:t> Developer-Agent für </a:t>
-            </a:r>
-            <a:r>
-              <a:rPr sz="1200" b="0" i="0" err="1">
-                <a:solidFill>
-                  <a:srgbClr val="444444"/>
-                </a:solidFill>
-              </a:rPr>
-              <a:t>einen</a:t>
-            </a:r>
-            <a:r>
-              <a:rPr sz="1200" b="0" i="0">
-                <a:solidFill>
-                  <a:srgbClr val="444444"/>
-                </a:solidFill>
-              </a:rPr>
-              <a:t> </a:t>
-            </a:r>
-            <a:r>
-              <a:rPr sz="1200" b="0" i="0" err="1">
-                <a:solidFill>
-                  <a:srgbClr val="444444"/>
-                </a:solidFill>
-              </a:rPr>
-              <a:t>Korrekturlauf</a:t>
-            </a:r>
-            <a:r>
-              <a:rPr sz="1200" b="0" i="0">
-                <a:solidFill>
-                  <a:srgbClr val="444444"/>
-                </a:solidFill>
-              </a:rPr>
-              <a:t>.</a:t>
+              <a:rPr sz="1200" b="0" i="0" dirty="0">
+                <a:solidFill>
+                  <a:srgbClr val="444444"/>
+                </a:solidFill>
+              </a:rPr>
+              <a:t> Graphen</a:t>
             </a:r>
           </a:p>
         </p:txBody>
@@ -25361,7 +25994,7 @@
         <p:spPr>
           <a:xfrm>
             <a:off x="7264908" y="3091180"/>
-            <a:ext cx="1828800" cy="1188720"/>
+            <a:ext cx="1828800" cy="369332"/>
           </a:xfrm>
           <a:prstGeom prst="rect">
             <a:avLst/>
@@ -25376,7 +26009,7 @@
           <a:p>
             <a:pPr algn="ctr"/>
             <a:r>
-              <a:rPr sz="900" b="0" i="0" err="1">
+              <a:rPr sz="900" b="0" i="0" dirty="0" err="1">
                 <a:solidFill>
                   <a:srgbClr val="555555"/>
                 </a:solidFill>
@@ -25384,7 +26017,7 @@
               <a:t>Schreibt</a:t>
             </a:r>
             <a:r>
-              <a:rPr sz="900" b="0" i="0">
+              <a:rPr sz="900" b="0" i="0" dirty="0">
                 <a:solidFill>
                   <a:srgbClr val="555555"/>
                 </a:solidFill>
@@ -25392,7 +26025,7 @@
               <a:t> </a:t>
             </a:r>
             <a:r>
-              <a:rPr sz="900" b="0" i="0" err="1">
+              <a:rPr sz="900" b="0" i="0" dirty="0" err="1">
                 <a:solidFill>
                   <a:srgbClr val="555555"/>
                 </a:solidFill>
@@ -25400,7 +26033,7 @@
               <a:t>pytest</a:t>
             </a:r>
             <a:r>
-              <a:rPr sz="900" b="0" i="0">
+              <a:rPr sz="900" b="0" i="0" dirty="0">
                 <a:solidFill>
                   <a:srgbClr val="555555"/>
                 </a:solidFill>
@@ -25409,7 +26042,7 @@
 </a:t>
             </a:r>
             <a:r>
-              <a:rPr sz="900" b="0" i="0" err="1">
+              <a:rPr sz="900" b="0" i="0" dirty="0" err="1">
                 <a:solidFill>
                   <a:srgbClr val="555555"/>
                 </a:solidFill>
@@ -25417,43 +26050,13 @@
               <a:t>basierte</a:t>
             </a:r>
             <a:r>
-              <a:rPr sz="900" b="0" i="0">
+              <a:rPr sz="900" b="0" i="0" dirty="0">
                 <a:solidFill>
                   <a:srgbClr val="555555"/>
                 </a:solidFill>
               </a:rPr>
-              <a:t> Tests </a:t>
-            </a:r>
-            <a:r>
-              <a:rPr sz="900" b="0" i="0" err="1">
-                <a:solidFill>
-                  <a:srgbClr val="555555"/>
-                </a:solidFill>
-              </a:rPr>
-              <a:t>im</a:t>
-            </a:r>
-            <a:r>
-              <a:rPr sz="900" b="0" i="0">
-                <a:solidFill>
-                  <a:srgbClr val="555555"/>
-                </a:solidFill>
-              </a:rPr>
-              <a:t>
-</a:t>
-            </a:r>
-            <a:r>
-              <a:rPr sz="900" b="0" i="0" err="1">
-                <a:solidFill>
-                  <a:srgbClr val="555555"/>
-                </a:solidFill>
-              </a:rPr>
-              <a:t>Arbeitsverzeichnis</a:t>
-            </a:r>
-            <a:endParaRPr sz="900" b="0" i="0">
-              <a:solidFill>
-                <a:srgbClr val="555555"/>
-              </a:solidFill>
-            </a:endParaRPr>
+              <a:t> Tests</a:t>
+            </a:r>
           </a:p>
         </p:txBody>
       </p:sp>
